--- a/orcx_relayshield_demo_proposal.pptx
+++ b/orcx_relayshield_demo_proposal.pptx
@@ -11,6 +11,7 @@
     <p:sldId id="259" r:id="rId5"/>
     <p:sldId id="260" r:id="rId6"/>
     <p:sldId id="261" r:id="rId7"/>
+    <p:sldId id="263" r:id="rId14"/>
     <p:sldId id="262" r:id="rId8"/>
   </p:sldIdLst>
   <p:notesMasterIdLst>
@@ -6799,6 +6800,713 @@
 </file>
 
 <file path=ppt/slides/slide7.xml><?xml version="1.0" encoding="utf-8"?>
+<p:sld xmlns:a="http://schemas.openxmlformats.org/drawingml/2006/main" xmlns:p="http://schemas.openxmlformats.org/presentationml/2006/main" xmlns:r="http://schemas.openxmlformats.org/officeDocument/2006/relationships">
+  <p:cSld>
+    <p:bg>
+      <p:bgPr>
+        <a:solidFill>
+          <a:srgbClr val="EDF1FA"/>
+        </a:solidFill>
+      </p:bgPr>
+    </p:bg>
+    <p:spTree>
+      <p:nvGrpSpPr>
+        <p:cNvPr id="1" name=""/>
+        <p:cNvGrpSpPr/>
+        <p:nvPr/>
+      </p:nvGrpSpPr>
+      <p:grpSpPr/>
+      <p:sp>
+        <p:nvSpPr>
+          <p:cNvPr id="2" name="Text 0"/>
+          <p:cNvSpPr/>
+          <p:nvPr/>
+        </p:nvSpPr>
+        <p:spPr>
+          <a:xfrm>
+            <a:off x="640080" y="457200"/>
+            <a:ext cx="8229600" cy="594360"/>
+          </a:xfrm>
+          <a:prstGeom prst="rect">
+            <a:avLst/>
+          </a:prstGeom>
+          <a:noFill/>
+          <a:ln/>
+        </p:spPr>
+        <p:txBody>
+          <a:bodyPr wrap="square" rtlCol="0" anchor="ctr"/>
+          <a:lstStyle/>
+          <a:p>
+            <a:pPr indent="0" marL="0">
+              <a:buNone/>
+            </a:pPr>
+            <a:r>
+              <a:rPr lang="en-US" sz="3000" b="1" dirty="0">
+                <a:solidFill>
+                  <a:srgbClr val="1A2138"/>
+                </a:solidFill>
+                <a:latin typeface="Cambria" pitchFamily="34" charset="0"/>
+                <a:ea typeface="Cambria" pitchFamily="34" charset="-122"/>
+                <a:cs typeface="Cambria" pitchFamily="34" charset="-120"/>
+              </a:rPr>
+              <a:t>How we'll know the demo worked</a:t>
+            </a:r>
+            <a:endParaRPr lang="en-US" sz="3000" dirty="0"/>
+          </a:p>
+        </p:txBody>
+      </p:sp>
+      <p:sp>
+        <p:nvSpPr>
+          <p:cNvPr id="3" name="Text 1"/>
+          <p:cNvSpPr/>
+          <p:nvPr/>
+        </p:nvSpPr>
+        <p:spPr>
+          <a:xfrm>
+            <a:off x="640080" y="1051560"/>
+            <a:ext cx="9875520" cy="411480"/>
+          </a:xfrm>
+          <a:prstGeom prst="rect">
+            <a:avLst/>
+          </a:prstGeom>
+          <a:noFill/>
+          <a:ln/>
+        </p:spPr>
+        <p:txBody>
+          <a:bodyPr wrap="square" rtlCol="0" anchor="ctr"/>
+          <a:lstStyle/>
+          <a:p>
+            <a:pPr indent="0" marL="0">
+              <a:buNone/>
+            </a:pPr>
+            <a:r>
+              <a:rPr lang="en-US" sz="1350" dirty="0">
+                <a:solidFill>
+                  <a:srgbClr val="7C88A6"/>
+                </a:solidFill>
+                <a:latin typeface="Calibri" pitchFamily="34" charset="0"/>
+                <a:ea typeface="Calibri" pitchFamily="34" charset="-122"/>
+                <a:cs typeface="Calibri" pitchFamily="34" charset="-120"/>
+              </a:rPr>
+              <a:t>Four criteria, agreed before we start. One of them can genuinely fail, and that is deliberate.</a:t>
+            </a:r>
+            <a:endParaRPr lang="en-US" sz="1350" dirty="0"/>
+          </a:p>
+        </p:txBody>
+      </p:sp>
+      <p:sp>
+        <p:nvSpPr>
+          <p:cNvPr id="4" name="Shape 2"/>
+          <p:cNvSpPr/>
+          <p:nvPr/>
+        </p:nvSpPr>
+        <p:spPr>
+          <a:xfrm>
+            <a:off x="640080" y="1874520"/>
+            <a:ext cx="10881360" cy="859536"/>
+          </a:xfrm>
+          <a:prstGeom prst="roundRect">
+            <a:avLst>
+              <a:gd name="adj" fmla="val 10638"/>
+            </a:avLst>
+          </a:prstGeom>
+          <a:solidFill>
+            <a:srgbClr val="FFFFFF"/>
+          </a:solidFill>
+          <a:ln/>
+          <a:effectLst>
+            <a:outerShdw sx="100000" sy="100000" kx="0" ky="0" algn="bl" rotWithShape="0" blurRad="76200" dist="25400" dir="5400000">
+              <a:srgbClr val="0B0F1F">
+                <a:alpha val="15000"/>
+              </a:srgbClr>
+            </a:outerShdw>
+          </a:effectLst>
+        </p:spPr>
+      </p:sp>
+      <p:sp>
+        <p:nvSpPr>
+          <p:cNvPr id="5" name="Shape 3"/>
+          <p:cNvSpPr/>
+          <p:nvPr/>
+        </p:nvSpPr>
+        <p:spPr>
+          <a:xfrm>
+            <a:off x="914400" y="2011680"/>
+            <a:ext cx="585216" cy="585216"/>
+          </a:xfrm>
+          <a:prstGeom prst="ellipse">
+            <a:avLst/>
+          </a:prstGeom>
+          <a:solidFill>
+            <a:srgbClr val="FF6D5A"/>
+          </a:solidFill>
+          <a:ln/>
+        </p:spPr>
+      </p:sp>
+      <p:pic>
+        <p:nvPicPr>
+          <p:cNvPr id="6" name="Image 0" descr="preencoded.png">    </p:cNvPr>
+          <p:cNvPicPr>
+            <a:picLocks noChangeAspect="1"/>
+          </p:cNvPicPr>
+          <p:nvPr/>
+        </p:nvPicPr>
+        <p:blipFill>
+          <a:blip r:embed="rId2"/>
+          <a:stretch>
+            <a:fillRect/>
+          </a:stretch>
+        </p:blipFill>
+        <p:spPr>
+          <a:xfrm>
+            <a:off x="1049000" y="2146280"/>
+            <a:ext cx="316017" cy="316017"/>
+          </a:xfrm>
+          <a:prstGeom prst="rect">
+            <a:avLst/>
+          </a:prstGeom>
+        </p:spPr>
+      </p:pic>
+      <p:sp>
+        <p:nvSpPr>
+          <p:cNvPr id="7" name="Text 4"/>
+          <p:cNvSpPr/>
+          <p:nvPr/>
+        </p:nvSpPr>
+        <p:spPr>
+          <a:xfrm>
+            <a:off x="1737360" y="1965960"/>
+            <a:ext cx="9509760" cy="329184"/>
+          </a:xfrm>
+          <a:prstGeom prst="rect">
+            <a:avLst/>
+          </a:prstGeom>
+          <a:noFill/>
+          <a:ln/>
+        </p:spPr>
+        <p:txBody>
+          <a:bodyPr wrap="square" rtlCol="0" anchor="ctr"/>
+          <a:lstStyle/>
+          <a:p>
+            <a:pPr indent="0" marL="0">
+              <a:buNone/>
+            </a:pPr>
+            <a:r>
+              <a:rPr lang="en-US" sz="1450" b="1" dirty="0">
+                <a:solidFill>
+                  <a:srgbClr val="1A2138"/>
+                </a:solidFill>
+                <a:latin typeface="Calibri" pitchFamily="34" charset="0"/>
+                <a:ea typeface="Calibri" pitchFamily="34" charset="-122"/>
+                <a:cs typeface="Calibri" pitchFamily="34" charset="-120"/>
+              </a:rPr>
+              <a:t>All three calls run inside Quantum's own flow</a:t>
+            </a:r>
+            <a:endParaRPr lang="en-US" sz="1450" dirty="0"/>
+          </a:p>
+        </p:txBody>
+      </p:sp>
+      <p:sp>
+        <p:nvSpPr>
+          <p:cNvPr id="8" name="Text 5"/>
+          <p:cNvSpPr/>
+          <p:nvPr/>
+        </p:nvSpPr>
+        <p:spPr>
+          <a:xfrm>
+            <a:off x="1737360" y="2295144"/>
+            <a:ext cx="9509760" cy="411480"/>
+          </a:xfrm>
+          <a:prstGeom prst="rect">
+            <a:avLst/>
+          </a:prstGeom>
+          <a:noFill/>
+          <a:ln/>
+        </p:spPr>
+        <p:txBody>
+          <a:bodyPr wrap="square" rtlCol="0" anchor="ctr"/>
+          <a:lstStyle/>
+          <a:p>
+            <a:pPr indent="0" marL="0">
+              <a:buNone/>
+            </a:pPr>
+            <a:r>
+              <a:rPr lang="en-US" sz="1150" dirty="0">
+                <a:solidFill>
+                  <a:srgbClr val="5B6B8C"/>
+                </a:solidFill>
+                <a:latin typeface="Calibri" pitchFamily="34" charset="0"/>
+                <a:ea typeface="Calibri" pitchFamily="34" charset="-122"/>
+                <a:cs typeface="Calibri" pitchFamily="34" charset="-120"/>
+              </a:rPr>
+              <a:t>Not a RelayShield demo script. The calls fire from your policy engine, against your own object model, in the live working session with Gary.</a:t>
+            </a:r>
+            <a:endParaRPr lang="en-US" sz="1150" dirty="0"/>
+          </a:p>
+        </p:txBody>
+      </p:sp>
+      <p:sp>
+        <p:nvSpPr>
+          <p:cNvPr id="9" name="Shape 6"/>
+          <p:cNvSpPr/>
+          <p:nvPr/>
+        </p:nvSpPr>
+        <p:spPr>
+          <a:xfrm>
+            <a:off x="640080" y="2898648"/>
+            <a:ext cx="10881360" cy="859536"/>
+          </a:xfrm>
+          <a:prstGeom prst="roundRect">
+            <a:avLst>
+              <a:gd name="adj" fmla="val 10638"/>
+            </a:avLst>
+          </a:prstGeom>
+          <a:solidFill>
+            <a:srgbClr val="FFFFFF"/>
+          </a:solidFill>
+          <a:ln/>
+          <a:effectLst>
+            <a:outerShdw sx="100000" sy="100000" kx="0" ky="0" algn="bl" rotWithShape="0" blurRad="76200" dist="25400" dir="5400000">
+              <a:srgbClr val="0B0F1F">
+                <a:alpha val="15000"/>
+              </a:srgbClr>
+            </a:outerShdw>
+          </a:effectLst>
+        </p:spPr>
+      </p:sp>
+      <p:sp>
+        <p:nvSpPr>
+          <p:cNvPr id="10" name="Shape 7"/>
+          <p:cNvSpPr/>
+          <p:nvPr/>
+        </p:nvSpPr>
+        <p:spPr>
+          <a:xfrm>
+            <a:off x="914400" y="3035808"/>
+            <a:ext cx="585216" cy="585216"/>
+          </a:xfrm>
+          <a:prstGeom prst="ellipse">
+            <a:avLst/>
+          </a:prstGeom>
+          <a:solidFill>
+            <a:srgbClr val="FF6D5A"/>
+          </a:solidFill>
+          <a:ln/>
+        </p:spPr>
+      </p:sp>
+      <p:pic>
+        <p:nvPicPr>
+          <p:cNvPr id="11" name="Image 1" descr="preencoded.png">    </p:cNvPr>
+          <p:cNvPicPr>
+            <a:picLocks noChangeAspect="1"/>
+          </p:cNvPicPr>
+          <p:nvPr/>
+        </p:nvPicPr>
+        <p:blipFill>
+          <a:blip r:embed="rId3"/>
+          <a:stretch>
+            <a:fillRect/>
+          </a:stretch>
+        </p:blipFill>
+        <p:spPr>
+          <a:xfrm>
+            <a:off x="1049000" y="3170408"/>
+            <a:ext cx="316017" cy="316017"/>
+          </a:xfrm>
+          <a:prstGeom prst="rect">
+            <a:avLst/>
+          </a:prstGeom>
+        </p:spPr>
+      </p:pic>
+      <p:sp>
+        <p:nvSpPr>
+          <p:cNvPr id="12" name="Text 8"/>
+          <p:cNvSpPr/>
+          <p:nvPr/>
+        </p:nvSpPr>
+        <p:spPr>
+          <a:xfrm>
+            <a:off x="1737360" y="2990088"/>
+            <a:ext cx="9509760" cy="329184"/>
+          </a:xfrm>
+          <a:prstGeom prst="rect">
+            <a:avLst/>
+          </a:prstGeom>
+          <a:noFill/>
+          <a:ln/>
+        </p:spPr>
+        <p:txBody>
+          <a:bodyPr wrap="square" rtlCol="0" anchor="ctr"/>
+          <a:lstStyle/>
+          <a:p>
+            <a:pPr indent="0" marL="0">
+              <a:buNone/>
+            </a:pPr>
+            <a:r>
+              <a:rPr lang="en-US" sz="1450" b="1" dirty="0">
+                <a:solidFill>
+                  <a:srgbClr val="1A2138"/>
+                </a:solidFill>
+                <a:latin typeface="Calibri" pitchFamily="34" charset="0"/>
+                <a:ea typeface="Calibri" pitchFamily="34" charset="-122"/>
+                <a:cs typeface="Calibri" pitchFamily="34" charset="-120"/>
+              </a:rPr>
+              <a:t>At least one upstream finding with no matching in-session behavior</a:t>
+            </a:r>
+            <a:endParaRPr lang="en-US" sz="1450" dirty="0"/>
+          </a:p>
+        </p:txBody>
+      </p:sp>
+      <p:sp>
+        <p:nvSpPr>
+          <p:cNvPr id="13" name="Text 9"/>
+          <p:cNvSpPr/>
+          <p:nvPr/>
+        </p:nvSpPr>
+        <p:spPr>
+          <a:xfrm>
+            <a:off x="1737360" y="3319272"/>
+            <a:ext cx="9509760" cy="411480"/>
+          </a:xfrm>
+          <a:prstGeom prst="rect">
+            <a:avLst/>
+          </a:prstGeom>
+          <a:noFill/>
+          <a:ln/>
+        </p:spPr>
+        <p:txBody>
+          <a:bodyPr wrap="square" rtlCol="0" anchor="ctr"/>
+          <a:lstStyle/>
+          <a:p>
+            <a:pPr indent="0" marL="0">
+              <a:buNone/>
+            </a:pPr>
+            <a:r>
+              <a:rPr lang="en-US" sz="1150" dirty="0">
+                <a:solidFill>
+                  <a:srgbClr val="5B6B8C"/>
+                </a:solidFill>
+                <a:latin typeface="Calibri" pitchFamily="34" charset="0"/>
+                <a:ea typeface="Calibri" pitchFamily="34" charset="-122"/>
+                <a:cs typeface="Calibri" pitchFamily="34" charset="-120"/>
+              </a:rPr>
+              <a:t>The entire premise of this deck. If 90 days pass without one, the integration has not proven its case, and both sides should know that plainly.</a:t>
+            </a:r>
+            <a:endParaRPr lang="en-US" sz="1150" dirty="0"/>
+          </a:p>
+        </p:txBody>
+      </p:sp>
+      <p:sp>
+        <p:nvSpPr>
+          <p:cNvPr id="14" name="Shape 10"/>
+          <p:cNvSpPr/>
+          <p:nvPr/>
+        </p:nvSpPr>
+        <p:spPr>
+          <a:xfrm>
+            <a:off x="640080" y="3922776"/>
+            <a:ext cx="10881360" cy="859536"/>
+          </a:xfrm>
+          <a:prstGeom prst="roundRect">
+            <a:avLst>
+              <a:gd name="adj" fmla="val 10638"/>
+            </a:avLst>
+          </a:prstGeom>
+          <a:solidFill>
+            <a:srgbClr val="FFFFFF"/>
+          </a:solidFill>
+          <a:ln/>
+          <a:effectLst>
+            <a:outerShdw sx="100000" sy="100000" kx="0" ky="0" algn="bl" rotWithShape="0" blurRad="76200" dist="25400" dir="5400000">
+              <a:srgbClr val="0B0F1F">
+                <a:alpha val="15000"/>
+              </a:srgbClr>
+            </a:outerShdw>
+          </a:effectLst>
+        </p:spPr>
+      </p:sp>
+      <p:sp>
+        <p:nvSpPr>
+          <p:cNvPr id="15" name="Shape 11"/>
+          <p:cNvSpPr/>
+          <p:nvPr/>
+        </p:nvSpPr>
+        <p:spPr>
+          <a:xfrm>
+            <a:off x="914400" y="4059936"/>
+            <a:ext cx="585216" cy="585216"/>
+          </a:xfrm>
+          <a:prstGeom prst="ellipse">
+            <a:avLst/>
+          </a:prstGeom>
+          <a:solidFill>
+            <a:srgbClr val="FF6D5A"/>
+          </a:solidFill>
+          <a:ln/>
+        </p:spPr>
+      </p:sp>
+      <p:pic>
+        <p:nvPicPr>
+          <p:cNvPr id="16" name="Image 2" descr="preencoded.png">    </p:cNvPr>
+          <p:cNvPicPr>
+            <a:picLocks noChangeAspect="1"/>
+          </p:cNvPicPr>
+          <p:nvPr/>
+        </p:nvPicPr>
+        <p:blipFill>
+          <a:blip r:embed="rId5"/>
+          <a:stretch>
+            <a:fillRect/>
+          </a:stretch>
+        </p:blipFill>
+        <p:spPr>
+          <a:xfrm>
+            <a:off x="1049000" y="4194536"/>
+            <a:ext cx="316017" cy="316017"/>
+          </a:xfrm>
+          <a:prstGeom prst="rect">
+            <a:avLst/>
+          </a:prstGeom>
+        </p:spPr>
+      </p:pic>
+      <p:sp>
+        <p:nvSpPr>
+          <p:cNvPr id="17" name="Text 12"/>
+          <p:cNvSpPr/>
+          <p:nvPr/>
+        </p:nvSpPr>
+        <p:spPr>
+          <a:xfrm>
+            <a:off x="1737360" y="4014216"/>
+            <a:ext cx="9509760" cy="329184"/>
+          </a:xfrm>
+          <a:prstGeom prst="rect">
+            <a:avLst/>
+          </a:prstGeom>
+          <a:noFill/>
+          <a:ln/>
+        </p:spPr>
+        <p:txBody>
+          <a:bodyPr wrap="square" rtlCol="0" anchor="ctr"/>
+          <a:lstStyle/>
+          <a:p>
+            <a:pPr indent="0" marL="0">
+              <a:buNone/>
+            </a:pPr>
+            <a:r>
+              <a:rPr lang="en-US" sz="1450" b="1" dirty="0">
+                <a:solidFill>
+                  <a:srgbClr val="1A2138"/>
+                </a:solidFill>
+                <a:latin typeface="Calibri" pitchFamily="34" charset="0"/>
+                <a:ea typeface="Calibri" pitchFamily="34" charset="-122"/>
+                <a:cs typeface="Calibri" pitchFamily="34" charset="-120"/>
+              </a:rPr>
+              <a:t>A score change produces a different policy outcome</a:t>
+            </a:r>
+            <a:endParaRPr lang="en-US" sz="1450" dirty="0"/>
+          </a:p>
+        </p:txBody>
+      </p:sp>
+      <p:sp>
+        <p:nvSpPr>
+          <p:cNvPr id="18" name="Text 13"/>
+          <p:cNvSpPr/>
+          <p:nvPr/>
+        </p:nvSpPr>
+        <p:spPr>
+          <a:xfrm>
+            <a:off x="1737360" y="4343400"/>
+            <a:ext cx="9509760" cy="411480"/>
+          </a:xfrm>
+          <a:prstGeom prst="rect">
+            <a:avLst/>
+          </a:prstGeom>
+          <a:noFill/>
+          <a:ln/>
+        </p:spPr>
+        <p:txBody>
+          <a:bodyPr wrap="square" rtlCol="0" anchor="ctr"/>
+          <a:lstStyle/>
+          <a:p>
+            <a:pPr indent="0" marL="0">
+              <a:buNone/>
+            </a:pPr>
+            <a:r>
+              <a:rPr lang="en-US" sz="1150" dirty="0">
+                <a:solidFill>
+                  <a:srgbClr val="5B6B8C"/>
+                </a:solidFill>
+                <a:latin typeface="Calibri" pitchFamily="34" charset="0"/>
+                <a:ea typeface="Calibri" pitchFamily="34" charset="-122"/>
+                <a:cs typeface="Calibri" pitchFamily="34" charset="-120"/>
+              </a:rPr>
+              <a:t>The 58 to 84 escalation must move Quantum from elevate to terminate. If the policy decision is identical either way, the score is decoration.</a:t>
+            </a:r>
+            <a:endParaRPr lang="en-US" sz="1150" dirty="0"/>
+          </a:p>
+        </p:txBody>
+      </p:sp>
+      <p:sp>
+        <p:nvSpPr>
+          <p:cNvPr id="19" name="Shape 14"/>
+          <p:cNvSpPr/>
+          <p:nvPr/>
+        </p:nvSpPr>
+        <p:spPr>
+          <a:xfrm>
+            <a:off x="640080" y="4946904"/>
+            <a:ext cx="10881360" cy="859536"/>
+          </a:xfrm>
+          <a:prstGeom prst="roundRect">
+            <a:avLst>
+              <a:gd name="adj" fmla="val 10638"/>
+            </a:avLst>
+          </a:prstGeom>
+          <a:solidFill>
+            <a:srgbClr val="FFFFFF"/>
+          </a:solidFill>
+          <a:ln/>
+          <a:effectLst>
+            <a:outerShdw sx="100000" sy="100000" kx="0" ky="0" algn="bl" rotWithShape="0" blurRad="76200" dist="25400" dir="5400000">
+              <a:srgbClr val="0B0F1F">
+                <a:alpha val="15000"/>
+              </a:srgbClr>
+            </a:outerShdw>
+          </a:effectLst>
+        </p:spPr>
+      </p:sp>
+      <p:sp>
+        <p:nvSpPr>
+          <p:cNvPr id="20" name="Shape 15"/>
+          <p:cNvSpPr/>
+          <p:nvPr/>
+        </p:nvSpPr>
+        <p:spPr>
+          <a:xfrm>
+            <a:off x="914400" y="5084064"/>
+            <a:ext cx="585216" cy="585216"/>
+          </a:xfrm>
+          <a:prstGeom prst="ellipse">
+            <a:avLst/>
+          </a:prstGeom>
+          <a:solidFill>
+            <a:srgbClr val="FF6D5A"/>
+          </a:solidFill>
+          <a:ln/>
+        </p:spPr>
+      </p:sp>
+      <p:pic>
+        <p:nvPicPr>
+          <p:cNvPr id="21" name="Image 3" descr="preencoded.png">    </p:cNvPr>
+          <p:cNvPicPr>
+            <a:picLocks noChangeAspect="1"/>
+          </p:cNvPicPr>
+          <p:nvPr/>
+        </p:nvPicPr>
+        <p:blipFill>
+          <a:blip r:embed="rId4"/>
+          <a:stretch>
+            <a:fillRect/>
+          </a:stretch>
+        </p:blipFill>
+        <p:spPr>
+          <a:xfrm>
+            <a:off x="1049000" y="5218664"/>
+            <a:ext cx="316017" cy="316017"/>
+          </a:xfrm>
+          <a:prstGeom prst="rect">
+            <a:avLst/>
+          </a:prstGeom>
+        </p:spPr>
+      </p:pic>
+      <p:sp>
+        <p:nvSpPr>
+          <p:cNvPr id="22" name="Text 16"/>
+          <p:cNvSpPr/>
+          <p:nvPr/>
+        </p:nvSpPr>
+        <p:spPr>
+          <a:xfrm>
+            <a:off x="1737360" y="5038344"/>
+            <a:ext cx="9509760" cy="329184"/>
+          </a:xfrm>
+          <a:prstGeom prst="rect">
+            <a:avLst/>
+          </a:prstGeom>
+          <a:noFill/>
+          <a:ln/>
+        </p:spPr>
+        <p:txBody>
+          <a:bodyPr wrap="square" rtlCol="0" anchor="ctr"/>
+          <a:lstStyle/>
+          <a:p>
+            <a:pPr indent="0" marL="0">
+              <a:buNone/>
+            </a:pPr>
+            <a:r>
+              <a:rPr lang="en-US" sz="1450" b="1" dirty="0">
+                <a:solidFill>
+                  <a:srgbClr val="1A2138"/>
+                </a:solidFill>
+                <a:latin typeface="Calibri" pitchFamily="34" charset="0"/>
+                <a:ea typeface="Calibri" pitchFamily="34" charset="-122"/>
+                <a:cs typeface="Calibri" pitchFamily="34" charset="-120"/>
+              </a:rPr>
+              <a:t>Degraded is never reported as clean</a:t>
+            </a:r>
+            <a:endParaRPr lang="en-US" sz="1450" dirty="0"/>
+          </a:p>
+        </p:txBody>
+      </p:sp>
+      <p:sp>
+        <p:nvSpPr>
+          <p:cNvPr id="23" name="Text 17"/>
+          <p:cNvSpPr/>
+          <p:nvPr/>
+        </p:nvSpPr>
+        <p:spPr>
+          <a:xfrm>
+            <a:off x="1737360" y="5367528"/>
+            <a:ext cx="9509760" cy="411480"/>
+          </a:xfrm>
+          <a:prstGeom prst="rect">
+            <a:avLst/>
+          </a:prstGeom>
+          <a:noFill/>
+          <a:ln/>
+        </p:spPr>
+        <p:txBody>
+          <a:bodyPr wrap="square" rtlCol="0" anchor="ctr"/>
+          <a:lstStyle/>
+          <a:p>
+            <a:pPr indent="0" marL="0">
+              <a:buNone/>
+            </a:pPr>
+            <a:r>
+              <a:rPr lang="en-US" sz="1150" dirty="0">
+                <a:solidFill>
+                  <a:srgbClr val="5B6B8C"/>
+                </a:solidFill>
+                <a:latin typeface="Calibri" pitchFamily="34" charset="0"/>
+                <a:ea typeface="Calibri" pitchFamily="34" charset="-122"/>
+                <a:cs typeface="Calibri" pitchFamily="34" charset="-120"/>
+              </a:rPr>
+              <a:t>Every unavailable source surfaces as degraded, never as a silent pass. This is the one failure mode that would make the feed unsafe to trust.</a:t>
+            </a:r>
+            <a:endParaRPr lang="en-US" sz="1150" dirty="0"/>
+          </a:p>
+        </p:txBody>
+      </p:sp>
+    </p:spTree>
+  </p:cSld>
+  <p:clrMapOvr>
+    <a:masterClrMapping/>
+  </p:clrMapOvr>
+</p:sld>
+</file>
+
+<file path=ppt/slides/slide8.xml><?xml version="1.0" encoding="utf-8"?>
 <p:sld xmlns:a="http://schemas.openxmlformats.org/drawingml/2006/main" xmlns:r="http://schemas.openxmlformats.org/officeDocument/2006/relationships" xmlns:p="http://schemas.openxmlformats.org/presentationml/2006/main">
   <p:cSld name="Slide 7">
     <p:bg>

--- a/orcx_relayshield_demo_proposal.pptx
+++ b/orcx_relayshield_demo_proposal.pptx
@@ -10,6 +10,7 @@
     <p:sldId id="258" r:id="rId4"/>
     <p:sldId id="259" r:id="rId5"/>
     <p:sldId id="260" r:id="rId6"/>
+    <p:sldId id="263" r:id="rId14"/>
     <p:sldId id="261" r:id="rId7"/>
     <p:sldId id="262" r:id="rId8"/>
   </p:sldIdLst>
@@ -7405,6 +7406,1080 @@
 </p:sld>
 </file>
 
+<file path=ppt/slides/slide8.xml><?xml version="1.0" encoding="utf-8"?>
+<p:sld xmlns:a="http://schemas.openxmlformats.org/drawingml/2006/main" xmlns:r="http://schemas.openxmlformats.org/officeDocument/2006/relationships" xmlns:p="http://schemas.openxmlformats.org/presentationml/2006/main">
+  <p:cSld name="Slide 3">
+    <p:bg>
+      <p:bgPr>
+        <a:solidFill>
+          <a:srgbClr val="EDF1FA"/>
+        </a:solidFill>
+      </p:bgPr>
+    </p:bg>
+    <p:spTree>
+      <p:nvGrpSpPr>
+        <p:cNvPr id="1" name=""/>
+        <p:cNvGrpSpPr/>
+        <p:nvPr/>
+      </p:nvGrpSpPr>
+      <p:grpSpPr>
+        <a:xfrm>
+          <a:off x="0" y="0"/>
+          <a:ext cx="0" cy="0"/>
+          <a:chOff x="0" y="0"/>
+          <a:chExt cx="0" cy="0"/>
+        </a:xfrm>
+      </p:grpSpPr>
+      <p:sp>
+        <p:nvSpPr>
+          <p:cNvPr id="2" name="Text 0"/>
+          <p:cNvSpPr/>
+          <p:nvPr/>
+        </p:nvSpPr>
+        <p:spPr>
+          <a:xfrm>
+            <a:off x="640080" y="411480"/>
+            <a:ext cx="8229600" cy="594360"/>
+          </a:xfrm>
+          <a:prstGeom prst="rect">
+            <a:avLst/>
+          </a:prstGeom>
+          <a:noFill/>
+          <a:ln/>
+        </p:spPr>
+        <p:txBody>
+          <a:bodyPr wrap="square" rtlCol="0" anchor="ctr"/>
+          <a:lstStyle/>
+          <a:p>
+            <a:pPr indent="0" marL="0">
+              <a:buNone/>
+            </a:pPr>
+            <a:r>
+              <a:rPr lang="en-US" sz="3000" b="1" dirty="0">
+                <a:solidFill>
+                  <a:srgbClr val="1A2138"/>
+                </a:solidFill>
+                <a:latin typeface="Cambria" pitchFamily="34" charset="0"/>
+                <a:ea typeface="Cambria" pitchFamily="34" charset="-122"/>
+                <a:cs typeface="Cambria" pitchFamily="34" charset="-120"/>
+              </a:rPr>
+              <a:t>Enriching the warning you already send</a:t>
+            </a:r>
+            <a:endParaRPr lang="en-US" sz="3000" dirty="0"/>
+          </a:p>
+        </p:txBody>
+      </p:sp>
+      <p:sp>
+        <p:nvSpPr>
+          <p:cNvPr id="3" name="Text 1"/>
+          <p:cNvSpPr/>
+          <p:nvPr/>
+        </p:nvSpPr>
+        <p:spPr>
+          <a:xfrm>
+            <a:off x="640080" y="987552"/>
+            <a:ext cx="10058400" cy="411480"/>
+          </a:xfrm>
+          <a:prstGeom prst="rect">
+            <a:avLst/>
+          </a:prstGeom>
+          <a:noFill/>
+          <a:ln/>
+        </p:spPr>
+        <p:txBody>
+          <a:bodyPr wrap="square" rtlCol="0" anchor="ctr"/>
+          <a:lstStyle/>
+          <a:p>
+            <a:pPr indent="0" marL="0">
+              <a:buNone/>
+            </a:pPr>
+            <a:r>
+              <a:rPr lang="en-US" sz="1350" dirty="0">
+                <a:solidFill>
+                  <a:srgbClr val="7C88A6"/>
+                </a:solidFill>
+                <a:latin typeface="Calibri" pitchFamily="34" charset="0"/>
+                <a:ea typeface="Calibri" pitchFamily="34" charset="-122"/>
+                <a:cs typeface="Calibri" pitchFamily="34" charset="-120"/>
+              </a:rPr>
+              <a:t>Quantum has observability and compliance warnings today, and no policy control yet. These three calls make that warning specific.</a:t>
+            </a:r>
+            <a:endParaRPr lang="en-US" sz="1350" dirty="0"/>
+          </a:p>
+        </p:txBody>
+      </p:sp>
+      <p:sp>
+        <p:nvSpPr>
+          <p:cNvPr id="4" name="Shape 2"/>
+          <p:cNvSpPr/>
+          <p:nvPr/>
+        </p:nvSpPr>
+        <p:spPr>
+          <a:xfrm>
+            <a:off x="1371600" y="1600200"/>
+            <a:ext cx="2743200" cy="548640"/>
+          </a:xfrm>
+          <a:prstGeom prst="roundRect">
+            <a:avLst>
+              <a:gd name="adj" fmla="val 13333"/>
+            </a:avLst>
+          </a:prstGeom>
+          <a:solidFill>
+            <a:srgbClr val="1E2749"/>
+          </a:solidFill>
+          <a:ln/>
+        </p:spPr>
+      </p:sp>
+      <p:sp>
+        <p:nvSpPr>
+          <p:cNvPr id="5" name="Text 3"/>
+          <p:cNvSpPr/>
+          <p:nvPr/>
+        </p:nvSpPr>
+        <p:spPr>
+          <a:xfrm>
+            <a:off x="1371600" y="1600200"/>
+            <a:ext cx="2743200" cy="548640"/>
+          </a:xfrm>
+          <a:prstGeom prst="rect">
+            <a:avLst/>
+          </a:prstGeom>
+          <a:noFill/>
+          <a:ln/>
+        </p:spPr>
+        <p:txBody>
+          <a:bodyPr wrap="square" rtlCol="0" anchor="ctr"/>
+          <a:lstStyle/>
+          <a:p>
+            <a:pPr algn="ctr" indent="0" marL="0">
+              <a:buNone/>
+            </a:pPr>
+            <a:r>
+              <a:rPr lang="en-US" sz="1400" b="1" spc="200" kern="0" dirty="0">
+                <a:solidFill>
+                  <a:srgbClr val="FFFFFF"/>
+                </a:solidFill>
+                <a:latin typeface="Calibri" pitchFamily="34" charset="0"/>
+                <a:ea typeface="Calibri" pitchFamily="34" charset="-122"/>
+                <a:cs typeface="Calibri" pitchFamily="34" charset="-120"/>
+              </a:rPr>
+              <a:t>QUANTUM TODAY</a:t>
+            </a:r>
+            <a:endParaRPr lang="en-US" sz="1400" dirty="0"/>
+          </a:p>
+        </p:txBody>
+      </p:sp>
+      <p:sp>
+        <p:nvSpPr>
+          <p:cNvPr id="6" name="Shape 4"/>
+          <p:cNvSpPr/>
+          <p:nvPr/>
+        </p:nvSpPr>
+        <p:spPr>
+          <a:xfrm>
+            <a:off x="8092440" y="1600200"/>
+            <a:ext cx="2743200" cy="548640"/>
+          </a:xfrm>
+          <a:prstGeom prst="roundRect">
+            <a:avLst>
+              <a:gd name="adj" fmla="val 13333"/>
+            </a:avLst>
+          </a:prstGeom>
+          <a:solidFill>
+            <a:srgbClr val="141B33"/>
+          </a:solidFill>
+          <a:ln/>
+        </p:spPr>
+      </p:sp>
+      <p:sp>
+        <p:nvSpPr>
+          <p:cNvPr id="7" name="Text 5"/>
+          <p:cNvSpPr/>
+          <p:nvPr/>
+        </p:nvSpPr>
+        <p:spPr>
+          <a:xfrm>
+            <a:off x="8092440" y="1600200"/>
+            <a:ext cx="2743200" cy="548640"/>
+          </a:xfrm>
+          <a:prstGeom prst="rect">
+            <a:avLst/>
+          </a:prstGeom>
+          <a:noFill/>
+          <a:ln/>
+        </p:spPr>
+        <p:txBody>
+          <a:bodyPr wrap="square" rtlCol="0" anchor="ctr"/>
+          <a:lstStyle/>
+          <a:p>
+            <a:pPr algn="ctr" indent="0" marL="0">
+              <a:buNone/>
+            </a:pPr>
+            <a:r>
+              <a:rPr lang="en-US" sz="1400" b="1" spc="200" kern="0" dirty="0">
+                <a:solidFill>
+                  <a:srgbClr val="FFFFFF"/>
+                </a:solidFill>
+                <a:latin typeface="Calibri" pitchFamily="34" charset="0"/>
+                <a:ea typeface="Calibri" pitchFamily="34" charset="-122"/>
+                <a:cs typeface="Calibri" pitchFamily="34" charset="-120"/>
+              </a:rPr>
+              <a:t>RELAYSHIELD</a:t>
+            </a:r>
+            <a:endParaRPr lang="en-US" sz="1400" dirty="0"/>
+          </a:p>
+        </p:txBody>
+      </p:sp>
+      <p:sp>
+        <p:nvSpPr>
+          <p:cNvPr id="8" name="Shape 6"/>
+          <p:cNvSpPr/>
+          <p:nvPr/>
+        </p:nvSpPr>
+        <p:spPr>
+          <a:xfrm>
+            <a:off x="2743200" y="2286000"/>
+            <a:ext cx="0" cy="3886200"/>
+          </a:xfrm>
+          <a:prstGeom prst="line">
+            <a:avLst/>
+          </a:prstGeom>
+          <a:noFill/>
+          <a:ln w="15875">
+            <a:solidFill>
+              <a:srgbClr val="C6CEE6"/>
+            </a:solidFill>
+            <a:prstDash val="dash"/>
+          </a:ln>
+        </p:spPr>
+      </p:sp>
+      <p:sp>
+        <p:nvSpPr>
+          <p:cNvPr id="9" name="Shape 7"/>
+          <p:cNvSpPr/>
+          <p:nvPr/>
+        </p:nvSpPr>
+        <p:spPr>
+          <a:xfrm>
+            <a:off x="9464040" y="2286000"/>
+            <a:ext cx="0" cy="3886200"/>
+          </a:xfrm>
+          <a:prstGeom prst="line">
+            <a:avLst/>
+          </a:prstGeom>
+          <a:noFill/>
+          <a:ln w="15875">
+            <a:solidFill>
+              <a:srgbClr val="C6CEE6"/>
+            </a:solidFill>
+            <a:prstDash val="dash"/>
+          </a:ln>
+        </p:spPr>
+      </p:sp>
+      <p:sp>
+        <p:nvSpPr>
+          <p:cNvPr id="10" name="Shape 8"/>
+          <p:cNvSpPr/>
+          <p:nvPr/>
+        </p:nvSpPr>
+        <p:spPr>
+          <a:xfrm>
+            <a:off x="4114800" y="2706624"/>
+            <a:ext cx="3977640" cy="0"/>
+          </a:xfrm>
+          <a:prstGeom prst="line">
+            <a:avLst/>
+          </a:prstGeom>
+          <a:noFill/>
+          <a:ln w="28575">
+            <a:solidFill>
+              <a:srgbClr val="5B6B8C"/>
+            </a:solidFill>
+            <a:prstDash val="solid"/>
+            <a:headEnd type="none"/>
+            <a:tailEnd type="triangle"/>
+          </a:ln>
+        </p:spPr>
+      </p:sp>
+      <p:sp>
+        <p:nvSpPr>
+          <p:cNvPr id="11" name="Shape 9"/>
+          <p:cNvSpPr/>
+          <p:nvPr/>
+        </p:nvSpPr>
+        <p:spPr>
+          <a:xfrm>
+            <a:off x="4572000" y="2423160"/>
+            <a:ext cx="3063240" cy="566928"/>
+          </a:xfrm>
+          <a:prstGeom prst="roundRect">
+            <a:avLst>
+              <a:gd name="adj" fmla="val 12903"/>
+            </a:avLst>
+          </a:prstGeom>
+          <a:solidFill>
+            <a:srgbClr val="FFFFFF"/>
+          </a:solidFill>
+          <a:ln/>
+          <a:effectLst>
+            <a:outerShdw sx="100000" sy="100000" kx="0" ky="0" algn="bl" rotWithShape="0" blurRad="76200" dist="25400" dir="5400000">
+              <a:srgbClr val="0B0F1F">
+                <a:alpha val="22000"/>
+              </a:srgbClr>
+            </a:outerShdw>
+          </a:effectLst>
+        </p:spPr>
+      </p:sp>
+      <p:sp>
+        <p:nvSpPr>
+          <p:cNvPr id="12" name="Shape 10"/>
+          <p:cNvSpPr/>
+          <p:nvPr/>
+        </p:nvSpPr>
+        <p:spPr>
+          <a:xfrm>
+            <a:off x="4681728" y="2532888"/>
+            <a:ext cx="347472" cy="347472"/>
+          </a:xfrm>
+          <a:prstGeom prst="ellipse">
+            <a:avLst/>
+          </a:prstGeom>
+          <a:solidFill>
+            <a:srgbClr val="5B6B8C"/>
+          </a:solidFill>
+          <a:ln/>
+        </p:spPr>
+      </p:sp>
+      <p:pic>
+        <p:nvPicPr>
+          <p:cNvPr id="13" name="Image 0" descr="preencoded.png">    </p:cNvPr>
+          <p:cNvPicPr>
+            <a:picLocks noChangeAspect="1"/>
+          </p:cNvPicPr>
+          <p:nvPr/>
+        </p:nvPicPr>
+        <p:blipFill>
+          <a:blip r:embed="rId1"/>
+          <a:stretch>
+            <a:fillRect/>
+          </a:stretch>
+        </p:blipFill>
+        <p:spPr>
+          <a:xfrm>
+            <a:off x="4751222" y="2602382"/>
+            <a:ext cx="208483" cy="208483"/>
+          </a:xfrm>
+          <a:prstGeom prst="rect">
+            <a:avLst/>
+          </a:prstGeom>
+        </p:spPr>
+      </p:pic>
+      <p:sp>
+        <p:nvSpPr>
+          <p:cNvPr id="14" name="Text 11"/>
+          <p:cNvSpPr/>
+          <p:nvPr/>
+        </p:nvSpPr>
+        <p:spPr>
+          <a:xfrm>
+            <a:off x="5102352" y="2464308"/>
+            <a:ext cx="2441448" cy="292608"/>
+          </a:xfrm>
+          <a:prstGeom prst="rect">
+            <a:avLst/>
+          </a:prstGeom>
+          <a:noFill/>
+          <a:ln/>
+        </p:spPr>
+        <p:txBody>
+          <a:bodyPr wrap="square" rtlCol="0" anchor="b"/>
+          <a:lstStyle/>
+          <a:p>
+            <a:pPr indent="0" marL="0">
+              <a:buNone/>
+            </a:pPr>
+            <a:r>
+              <a:rPr lang="en-US" sz="1150" b="1" dirty="0">
+                <a:solidFill>
+                  <a:srgbClr val="1A2138"/>
+                </a:solidFill>
+                <a:latin typeface="Calibri" pitchFamily="34" charset="0"/>
+                <a:ea typeface="Calibri" pitchFamily="34" charset="-122"/>
+                <a:cs typeface="Calibri" pitchFamily="34" charset="-120"/>
+              </a:rPr>
+              <a:t>1 · Orchestrator already sees the session</a:t>
+            </a:r>
+            <a:endParaRPr lang="en-US" sz="1150" dirty="0"/>
+          </a:p>
+        </p:txBody>
+      </p:sp>
+      <p:sp>
+        <p:nvSpPr>
+          <p:cNvPr id="15" name="Text 12"/>
+          <p:cNvSpPr/>
+          <p:nvPr/>
+        </p:nvSpPr>
+        <p:spPr>
+          <a:xfrm>
+            <a:off x="5102352" y="2715768"/>
+            <a:ext cx="2441448" cy="256032"/>
+          </a:xfrm>
+          <a:prstGeom prst="rect">
+            <a:avLst/>
+          </a:prstGeom>
+          <a:noFill/>
+          <a:ln/>
+        </p:spPr>
+        <p:txBody>
+          <a:bodyPr wrap="square" rtlCol="0" anchor="t"/>
+          <a:lstStyle/>
+          <a:p>
+            <a:pPr indent="0" marL="0">
+              <a:buNone/>
+            </a:pPr>
+            <a:r>
+              <a:rPr lang="en-US" sz="950" i="1" dirty="0">
+                <a:solidFill>
+                  <a:srgbClr val="1A2138">
+                    <a:alpha val="85000"/>
+                  </a:srgbClr>
+                </a:solidFill>
+                <a:latin typeface="Calibri" pitchFamily="34" charset="0"/>
+                <a:ea typeface="Calibri" pitchFamily="34" charset="-122"/>
+                <a:cs typeface="Calibri" pitchFamily="34" charset="-120"/>
+              </a:rPr>
+              <a:t>Agent id, context id, service account, domain</a:t>
+            </a:r>
+            <a:endParaRPr lang="en-US" sz="950" dirty="0"/>
+          </a:p>
+        </p:txBody>
+      </p:sp>
+      <p:sp>
+        <p:nvSpPr>
+          <p:cNvPr id="16" name="Shape 13"/>
+          <p:cNvSpPr/>
+          <p:nvPr/>
+        </p:nvSpPr>
+        <p:spPr>
+          <a:xfrm>
+            <a:off x="8298180" y="3246120"/>
+            <a:ext cx="2331720" cy="502920"/>
+          </a:xfrm>
+          <a:prstGeom prst="roundRect">
+            <a:avLst>
+              <a:gd name="adj" fmla="val 14545"/>
+            </a:avLst>
+          </a:prstGeom>
+          <a:solidFill>
+            <a:srgbClr val="DCE3F5"/>
+          </a:solidFill>
+          <a:ln/>
+        </p:spPr>
+      </p:sp>
+      <p:sp>
+        <p:nvSpPr>
+          <p:cNvPr id="17" name="Text 14"/>
+          <p:cNvSpPr/>
+          <p:nvPr/>
+        </p:nvSpPr>
+        <p:spPr>
+          <a:xfrm>
+            <a:off x="8435340" y="3264408"/>
+            <a:ext cx="2057400" cy="466344"/>
+          </a:xfrm>
+          <a:prstGeom prst="rect">
+            <a:avLst/>
+          </a:prstGeom>
+          <a:noFill/>
+          <a:ln/>
+        </p:spPr>
+        <p:txBody>
+          <a:bodyPr wrap="square" rtlCol="0" anchor="ctr"/>
+          <a:lstStyle/>
+          <a:p>
+            <a:pPr algn="ctr" indent="0" marL="0">
+              <a:lnSpc>
+                <a:spcPts val="1100"/>
+              </a:lnSpc>
+              <a:buNone/>
+            </a:pPr>
+            <a:r>
+              <a:rPr lang="en-US" sz="900" dirty="0">
+                <a:solidFill>
+                  <a:srgbClr val="5B6B8C"/>
+                </a:solidFill>
+                <a:latin typeface="Calibri" pitchFamily="34" charset="0"/>
+                <a:ea typeface="Calibri" pitchFamily="34" charset="-122"/>
+                <a:cs typeface="Calibri" pitchFamily="34" charset="-120"/>
+              </a:rPr>
+              <a:t>Enriched by three calls:</a:t>
+            </a:r>
+            <a:endParaRPr lang="en-US" sz="900" dirty="0"/>
+          </a:p>
+          <a:p>
+            <a:pPr algn="ctr" indent="0" marL="0">
+              <a:lnSpc>
+                <a:spcPts val="1100"/>
+              </a:lnSpc>
+              <a:buNone/>
+            </a:pPr>
+            <a:r>
+              <a:rPr lang="en-US" sz="900" dirty="0">
+                <a:solidFill>
+                  <a:srgbClr val="5B6B8C"/>
+                </a:solidFill>
+                <a:latin typeface="Calibri" pitchFamily="34" charset="0"/>
+                <a:ea typeface="Calibri" pitchFamily="34" charset="-122"/>
+                <a:cs typeface="Calibri" pitchFamily="34" charset="-120"/>
+              </a:rPr>
+              <a:t>oauth-watchlist · session-risk · risk-score</a:t>
+            </a:r>
+            <a:endParaRPr lang="en-US" sz="900" dirty="0"/>
+          </a:p>
+        </p:txBody>
+      </p:sp>
+      <p:sp>
+        <p:nvSpPr>
+          <p:cNvPr id="18" name="Shape 15"/>
+          <p:cNvSpPr/>
+          <p:nvPr/>
+        </p:nvSpPr>
+        <p:spPr>
+          <a:xfrm>
+            <a:off x="2743200" y="4306824"/>
+            <a:ext cx="6720840" cy="0"/>
+          </a:xfrm>
+          <a:prstGeom prst="line">
+            <a:avLst/>
+          </a:prstGeom>
+          <a:noFill/>
+          <a:ln w="28575">
+            <a:solidFill>
+              <a:srgbClr val="FF6D5A"/>
+            </a:solidFill>
+            <a:prstDash val="solid"/>
+            <a:headEnd type="triangle"/>
+            <a:tailEnd type="none"/>
+          </a:ln>
+        </p:spPr>
+      </p:sp>
+      <p:sp>
+        <p:nvSpPr>
+          <p:cNvPr id="19" name="Shape 16"/>
+          <p:cNvSpPr/>
+          <p:nvPr/>
+        </p:nvSpPr>
+        <p:spPr>
+          <a:xfrm>
+            <a:off x="4572000" y="4023360"/>
+            <a:ext cx="3063240" cy="566928"/>
+          </a:xfrm>
+          <a:prstGeom prst="roundRect">
+            <a:avLst>
+              <a:gd name="adj" fmla="val 12903"/>
+            </a:avLst>
+          </a:prstGeom>
+          <a:solidFill>
+            <a:srgbClr val="141B33"/>
+          </a:solidFill>
+          <a:ln/>
+          <a:effectLst>
+            <a:outerShdw sx="100000" sy="100000" kx="0" ky="0" algn="bl" rotWithShape="0" blurRad="76200" dist="25400" dir="5400000">
+              <a:srgbClr val="0B0F1F">
+                <a:alpha val="22000"/>
+              </a:srgbClr>
+            </a:outerShdw>
+          </a:effectLst>
+        </p:spPr>
+      </p:sp>
+      <p:sp>
+        <p:nvSpPr>
+          <p:cNvPr id="20" name="Shape 17"/>
+          <p:cNvSpPr/>
+          <p:nvPr/>
+        </p:nvSpPr>
+        <p:spPr>
+          <a:xfrm>
+            <a:off x="4681728" y="4133088"/>
+            <a:ext cx="347472" cy="347472"/>
+          </a:xfrm>
+          <a:prstGeom prst="ellipse">
+            <a:avLst/>
+          </a:prstGeom>
+          <a:solidFill>
+            <a:srgbClr val="FF6D5A"/>
+          </a:solidFill>
+          <a:ln/>
+        </p:spPr>
+      </p:sp>
+      <p:pic>
+        <p:nvPicPr>
+          <p:cNvPr id="21" name="Image 1" descr="preencoded.png">    </p:cNvPr>
+          <p:cNvPicPr>
+            <a:picLocks noChangeAspect="1"/>
+          </p:cNvPicPr>
+          <p:nvPr/>
+        </p:nvPicPr>
+        <p:blipFill>
+          <a:blip r:embed="rId2"/>
+          <a:stretch>
+            <a:fillRect/>
+          </a:stretch>
+        </p:blipFill>
+        <p:spPr>
+          <a:xfrm>
+            <a:off x="4751222" y="4202582"/>
+            <a:ext cx="208483" cy="208483"/>
+          </a:xfrm>
+          <a:prstGeom prst="rect">
+            <a:avLst/>
+          </a:prstGeom>
+        </p:spPr>
+      </p:pic>
+      <p:sp>
+        <p:nvSpPr>
+          <p:cNvPr id="22" name="Text 18"/>
+          <p:cNvSpPr/>
+          <p:nvPr/>
+        </p:nvSpPr>
+        <p:spPr>
+          <a:xfrm>
+            <a:off x="5102352" y="4064508"/>
+            <a:ext cx="2441448" cy="292608"/>
+          </a:xfrm>
+          <a:prstGeom prst="rect">
+            <a:avLst/>
+          </a:prstGeom>
+          <a:noFill/>
+          <a:ln/>
+        </p:spPr>
+        <p:txBody>
+          <a:bodyPr wrap="square" rtlCol="0" anchor="b"/>
+          <a:lstStyle/>
+          <a:p>
+            <a:pPr indent="0" marL="0">
+              <a:buNone/>
+            </a:pPr>
+            <a:r>
+              <a:rPr lang="en-US" sz="1150" b="1" dirty="0">
+                <a:solidFill>
+                  <a:srgbClr val="FFFFFF"/>
+                </a:solidFill>
+                <a:latin typeface="Calibri" pitchFamily="34" charset="0"/>
+                <a:ea typeface="Calibri" pitchFamily="34" charset="-122"/>
+                <a:cs typeface="Calibri" pitchFamily="34" charset="-120"/>
+              </a:rPr>
+              <a:t>2 · oauth-watchlist returns a finding</a:t>
+            </a:r>
+            <a:endParaRPr lang="en-US" sz="1150" dirty="0"/>
+          </a:p>
+        </p:txBody>
+      </p:sp>
+      <p:sp>
+        <p:nvSpPr>
+          <p:cNvPr id="23" name="Text 19"/>
+          <p:cNvSpPr/>
+          <p:nvPr/>
+        </p:nvSpPr>
+        <p:spPr>
+          <a:xfrm>
+            <a:off x="5102352" y="4315968"/>
+            <a:ext cx="2441448" cy="256032"/>
+          </a:xfrm>
+          <a:prstGeom prst="rect">
+            <a:avLst/>
+          </a:prstGeom>
+          <a:noFill/>
+          <a:ln/>
+        </p:spPr>
+        <p:txBody>
+          <a:bodyPr wrap="square" rtlCol="0" anchor="t"/>
+          <a:lstStyle/>
+          <a:p>
+            <a:pPr indent="0" marL="0">
+              <a:buNone/>
+            </a:pPr>
+            <a:r>
+              <a:rPr lang="en-US" sz="950" i="1" dirty="0">
+                <a:solidFill>
+                  <a:srgbClr val="FFFFFF">
+                    <a:alpha val="85000"/>
+                  </a:srgbClr>
+                </a:solidFill>
+                <a:latin typeface="Calibri" pitchFamily="34" charset="0"/>
+                <a:ea typeface="Calibri" pitchFamily="34" charset="-122"/>
+                <a:cs typeface="Calibri" pitchFamily="34" charset="-120"/>
+              </a:rPr>
+              <a:t>OAuth grant matched in stealer-log corpus</a:t>
+            </a:r>
+            <a:endParaRPr lang="en-US" sz="950" dirty="0"/>
+          </a:p>
+        </p:txBody>
+      </p:sp>
+      <p:sp>
+        <p:nvSpPr>
+          <p:cNvPr id="24" name="Shape 20"/>
+          <p:cNvSpPr/>
+          <p:nvPr/>
+        </p:nvSpPr>
+        <p:spPr>
+          <a:xfrm>
+            <a:off x="2743200" y="5175504"/>
+            <a:ext cx="6720840" cy="0"/>
+          </a:xfrm>
+          <a:prstGeom prst="line">
+            <a:avLst/>
+          </a:prstGeom>
+          <a:noFill/>
+          <a:ln w="28575">
+            <a:solidFill>
+              <a:srgbClr val="C93B2E"/>
+            </a:solidFill>
+            <a:prstDash val="solid"/>
+            <a:headEnd type="triangle"/>
+            <a:tailEnd type="none"/>
+          </a:ln>
+        </p:spPr>
+      </p:sp>
+      <p:sp>
+        <p:nvSpPr>
+          <p:cNvPr id="25" name="Shape 21"/>
+          <p:cNvSpPr/>
+          <p:nvPr/>
+        </p:nvSpPr>
+        <p:spPr>
+          <a:xfrm>
+            <a:off x="4572000" y="4892040"/>
+            <a:ext cx="3063240" cy="566928"/>
+          </a:xfrm>
+          <a:prstGeom prst="roundRect">
+            <a:avLst>
+              <a:gd name="adj" fmla="val 12903"/>
+            </a:avLst>
+          </a:prstGeom>
+          <a:solidFill>
+            <a:srgbClr val="141B33"/>
+          </a:solidFill>
+          <a:ln/>
+          <a:effectLst>
+            <a:outerShdw sx="100000" sy="100000" kx="0" ky="0" algn="bl" rotWithShape="0" blurRad="76200" dist="25400" dir="5400000">
+              <a:srgbClr val="0B0F1F">
+                <a:alpha val="22000"/>
+              </a:srgbClr>
+            </a:outerShdw>
+          </a:effectLst>
+        </p:spPr>
+      </p:sp>
+      <p:sp>
+        <p:nvSpPr>
+          <p:cNvPr id="26" name="Shape 22"/>
+          <p:cNvSpPr/>
+          <p:nvPr/>
+        </p:nvSpPr>
+        <p:spPr>
+          <a:xfrm>
+            <a:off x="4681728" y="5001768"/>
+            <a:ext cx="347472" cy="347472"/>
+          </a:xfrm>
+          <a:prstGeom prst="ellipse">
+            <a:avLst/>
+          </a:prstGeom>
+          <a:solidFill>
+            <a:srgbClr val="C93B2E"/>
+          </a:solidFill>
+          <a:ln/>
+        </p:spPr>
+      </p:sp>
+      <p:pic>
+        <p:nvPicPr>
+          <p:cNvPr id="27" name="Image 2" descr="preencoded.png">    </p:cNvPr>
+          <p:cNvPicPr>
+            <a:picLocks noChangeAspect="1"/>
+          </p:cNvPicPr>
+          <p:nvPr/>
+        </p:nvPicPr>
+        <p:blipFill>
+          <a:blip r:embed="rId3"/>
+          <a:stretch>
+            <a:fillRect/>
+          </a:stretch>
+        </p:blipFill>
+        <p:spPr>
+          <a:xfrm>
+            <a:off x="4751222" y="5071262"/>
+            <a:ext cx="208483" cy="208483"/>
+          </a:xfrm>
+          <a:prstGeom prst="rect">
+            <a:avLst/>
+          </a:prstGeom>
+        </p:spPr>
+      </p:pic>
+      <p:sp>
+        <p:nvSpPr>
+          <p:cNvPr id="28" name="Text 23"/>
+          <p:cNvSpPr/>
+          <p:nvPr/>
+        </p:nvSpPr>
+        <p:spPr>
+          <a:xfrm>
+            <a:off x="5102352" y="4933188"/>
+            <a:ext cx="2441448" cy="292608"/>
+          </a:xfrm>
+          <a:prstGeom prst="rect">
+            <a:avLst/>
+          </a:prstGeom>
+          <a:noFill/>
+          <a:ln/>
+        </p:spPr>
+        <p:txBody>
+          <a:bodyPr wrap="square" rtlCol="0" anchor="b"/>
+          <a:lstStyle/>
+          <a:p>
+            <a:pPr indent="0" marL="0">
+              <a:buNone/>
+            </a:pPr>
+            <a:r>
+              <a:rPr lang="en-US" sz="1150" b="1" dirty="0">
+                <a:solidFill>
+                  <a:srgbClr val="FFFFFF"/>
+                </a:solidFill>
+                <a:latin typeface="Calibri" pitchFamily="34" charset="0"/>
+                <a:ea typeface="Calibri" pitchFamily="34" charset="-122"/>
+                <a:cs typeface="Calibri" pitchFamily="34" charset="-120"/>
+              </a:rPr>
+              <a:t>3 · session-risk + identity-risk-score</a:t>
+            </a:r>
+            <a:endParaRPr lang="en-US" sz="1150" dirty="0"/>
+          </a:p>
+        </p:txBody>
+      </p:sp>
+      <p:sp>
+        <p:nvSpPr>
+          <p:cNvPr id="29" name="Text 24"/>
+          <p:cNvSpPr/>
+          <p:nvPr/>
+        </p:nvSpPr>
+        <p:spPr>
+          <a:xfrm>
+            <a:off x="5102352" y="5184648"/>
+            <a:ext cx="2441448" cy="256032"/>
+          </a:xfrm>
+          <a:prstGeom prst="rect">
+            <a:avLst/>
+          </a:prstGeom>
+          <a:noFill/>
+          <a:ln/>
+        </p:spPr>
+        <p:txBody>
+          <a:bodyPr wrap="square" rtlCol="0" anchor="t"/>
+          <a:lstStyle/>
+          <a:p>
+            <a:pPr indent="0" marL="0">
+              <a:buNone/>
+            </a:pPr>
+            <a:r>
+              <a:rPr lang="en-US" sz="950" i="1" dirty="0">
+                <a:solidFill>
+                  <a:srgbClr val="FFFFFF">
+                    <a:alpha val="85000"/>
+                  </a:srgbClr>
+                </a:solidFill>
+                <a:latin typeface="Calibri" pitchFamily="34" charset="0"/>
+                <a:ea typeface="Calibri" pitchFamily="34" charset="-122"/>
+                <a:cs typeface="Calibri" pitchFamily="34" charset="-120"/>
+              </a:rPr>
+              <a:t>Live session cookie · 84/100 · Grade D</a:t>
+            </a:r>
+            <a:endParaRPr lang="en-US" sz="950" dirty="0"/>
+          </a:p>
+        </p:txBody>
+      </p:sp>
+      <p:sp>
+        <p:nvSpPr>
+          <p:cNvPr id="30" name="Shape 25"/>
+          <p:cNvSpPr/>
+          <p:nvPr/>
+        </p:nvSpPr>
+        <p:spPr>
+          <a:xfrm>
+            <a:off x="4114800" y="6044184"/>
+            <a:ext cx="3977640" cy="0"/>
+          </a:xfrm>
+          <a:prstGeom prst="line">
+            <a:avLst/>
+          </a:prstGeom>
+          <a:noFill/>
+          <a:ln w="28575">
+            <a:solidFill>
+              <a:srgbClr val="1FAA6E"/>
+            </a:solidFill>
+            <a:prstDash val="solid"/>
+            <a:headEnd type="none"/>
+            <a:tailEnd type="triangle"/>
+          </a:ln>
+        </p:spPr>
+      </p:sp>
+      <p:sp>
+        <p:nvSpPr>
+          <p:cNvPr id="31" name="Shape 26"/>
+          <p:cNvSpPr/>
+          <p:nvPr/>
+        </p:nvSpPr>
+        <p:spPr>
+          <a:xfrm>
+            <a:off x="4572000" y="5760720"/>
+            <a:ext cx="3063240" cy="566928"/>
+          </a:xfrm>
+          <a:prstGeom prst="roundRect">
+            <a:avLst>
+              <a:gd name="adj" fmla="val 12903"/>
+            </a:avLst>
+          </a:prstGeom>
+          <a:solidFill>
+            <a:srgbClr val="FFFFFF"/>
+          </a:solidFill>
+          <a:ln/>
+          <a:effectLst>
+            <a:outerShdw sx="100000" sy="100000" kx="0" ky="0" algn="bl" rotWithShape="0" blurRad="76200" dist="25400" dir="5400000">
+              <a:srgbClr val="0B0F1F">
+                <a:alpha val="22000"/>
+              </a:srgbClr>
+            </a:outerShdw>
+          </a:effectLst>
+        </p:spPr>
+      </p:sp>
+      <p:sp>
+        <p:nvSpPr>
+          <p:cNvPr id="32" name="Shape 27"/>
+          <p:cNvSpPr/>
+          <p:nvPr/>
+        </p:nvSpPr>
+        <p:spPr>
+          <a:xfrm>
+            <a:off x="4681728" y="5870448"/>
+            <a:ext cx="347472" cy="347472"/>
+          </a:xfrm>
+          <a:prstGeom prst="ellipse">
+            <a:avLst/>
+          </a:prstGeom>
+          <a:solidFill>
+            <a:srgbClr val="1FAA6E"/>
+          </a:solidFill>
+          <a:ln/>
+        </p:spPr>
+      </p:sp>
+      <p:pic>
+        <p:nvPicPr>
+          <p:cNvPr id="33" name="Image 3" descr="preencoded.png">    </p:cNvPr>
+          <p:cNvPicPr>
+            <a:picLocks noChangeAspect="1"/>
+          </p:cNvPicPr>
+          <p:nvPr/>
+        </p:nvPicPr>
+        <p:blipFill>
+          <a:blip r:embed="rId4"/>
+          <a:stretch>
+            <a:fillRect/>
+          </a:stretch>
+        </p:blipFill>
+        <p:spPr>
+          <a:xfrm>
+            <a:off x="4751222" y="5939942"/>
+            <a:ext cx="208483" cy="208483"/>
+          </a:xfrm>
+          <a:prstGeom prst="rect">
+            <a:avLst/>
+          </a:prstGeom>
+        </p:spPr>
+      </p:pic>
+      <p:sp>
+        <p:nvSpPr>
+          <p:cNvPr id="34" name="Text 28"/>
+          <p:cNvSpPr/>
+          <p:nvPr/>
+        </p:nvSpPr>
+        <p:spPr>
+          <a:xfrm>
+            <a:off x="5102352" y="5801868"/>
+            <a:ext cx="2441448" cy="292608"/>
+          </a:xfrm>
+          <a:prstGeom prst="rect">
+            <a:avLst/>
+          </a:prstGeom>
+          <a:noFill/>
+          <a:ln/>
+        </p:spPr>
+        <p:txBody>
+          <a:bodyPr wrap="square" rtlCol="0" anchor="b"/>
+          <a:lstStyle/>
+          <a:p>
+            <a:pPr indent="0" marL="0">
+              <a:buNone/>
+            </a:pPr>
+            <a:r>
+              <a:rPr lang="en-US" sz="1150" b="1" dirty="0">
+                <a:solidFill>
+                  <a:srgbClr val="1A2138"/>
+                </a:solidFill>
+                <a:latin typeface="Calibri" pitchFamily="34" charset="0"/>
+                <a:ea typeface="Calibri" pitchFamily="34" charset="-122"/>
+                <a:cs typeface="Calibri" pitchFamily="34" charset="-120"/>
+              </a:rPr>
+              <a:t>4 · OUT-OF-COMPLIANCE warning</a:t>
+            </a:r>
+            <a:endParaRPr lang="en-US" sz="1150" dirty="0"/>
+          </a:p>
+        </p:txBody>
+      </p:sp>
+      <p:sp>
+        <p:nvSpPr>
+          <p:cNvPr id="35" name="Text 29"/>
+          <p:cNvSpPr/>
+          <p:nvPr/>
+        </p:nvSpPr>
+        <p:spPr>
+          <a:xfrm>
+            <a:off x="5102352" y="6053328"/>
+            <a:ext cx="2441448" cy="256032"/>
+          </a:xfrm>
+          <a:prstGeom prst="rect">
+            <a:avLst/>
+          </a:prstGeom>
+          <a:noFill/>
+          <a:ln/>
+        </p:spPr>
+        <p:txBody>
+          <a:bodyPr wrap="square" rtlCol="0" anchor="t"/>
+          <a:lstStyle/>
+          <a:p>
+            <a:pPr indent="0" marL="0">
+              <a:buNone/>
+            </a:pPr>
+            <a:r>
+              <a:rPr lang="en-US" sz="950" i="1" dirty="0">
+                <a:solidFill>
+                  <a:srgbClr val="1A2138">
+                    <a:alpha val="85000"/>
+                  </a:srgbClr>
+                </a:solidFill>
+                <a:latin typeface="Calibri" pitchFamily="34" charset="0"/>
+                <a:ea typeface="Calibri" pitchFamily="34" charset="-122"/>
+                <a:cs typeface="Calibri" pitchFamily="34" charset="-120"/>
+              </a:rPr>
+              <a:t>Your existing warning, now naming the reason</a:t>
+            </a:r>
+            <a:endParaRPr lang="en-US" sz="950" dirty="0"/>
+          </a:p>
+        </p:txBody>
+      </p:sp>
+    </p:spTree>
+  </p:cSld>
+  <p:clrMapOvr>
+    <a:masterClrMapping/>
+  </p:clrMapOvr>
+</p:sld>
+</file>
+
 <file path=ppt/theme/theme1.xml><?xml version="1.0" encoding="utf-8"?>
 <a:theme xmlns:a="http://schemas.openxmlformats.org/drawingml/2006/main" name="Office Theme">
   <a:themeElements>
